--- a/output_pptx/Stronger.pptx
+++ b/output_pptx/Stronger.pptx
@@ -3117,8 +3117,8 @@
         </p:nvSpPr>
         <p:spPr>
           <a:xfrm>
-            <a:off x="594360" y="1837944"/>
-            <a:ext cx="11002975" cy="685800"/>
+            <a:off x="640080" y="1650492"/>
+            <a:ext cx="10911535" cy="731520"/>
           </a:xfrm>
           <a:prstGeom prst="rect">
             <a:avLst/>
@@ -3133,7 +3133,7 @@
           <a:p>
             <a:pPr algn="ctr"/>
             <a:r>
-              <a:rPr sz="4400" b="1" i="0">
+              <a:rPr sz="4800" b="1" i="0">
                 <a:solidFill>
                   <a:srgbClr val="FFFFFF"/>
                 </a:solidFill>
@@ -3152,8 +3152,8 @@
         </p:nvSpPr>
         <p:spPr>
           <a:xfrm>
-            <a:off x="594360" y="2560320"/>
-            <a:ext cx="11002975" cy="384048"/>
+            <a:off x="640080" y="2418588"/>
+            <a:ext cx="10911535" cy="365760"/>
           </a:xfrm>
           <a:prstGeom prst="rect">
             <a:avLst/>
@@ -3170,7 +3170,7 @@
             <a:r>
               <a:rPr sz="2400" b="0" i="1">
                 <a:solidFill>
-                  <a:srgbClr val="B4B4B4"/>
+                  <a:srgbClr val="AAAAAA"/>
                 </a:solidFill>
                 <a:latin typeface="Arial"/>
               </a:rPr>
@@ -3187,8 +3187,8 @@
         </p:nvSpPr>
         <p:spPr>
           <a:xfrm>
-            <a:off x="594360" y="2980944"/>
-            <a:ext cx="11002975" cy="347472"/>
+            <a:off x="640080" y="2985516"/>
+            <a:ext cx="10911535" cy="731520"/>
           </a:xfrm>
           <a:prstGeom prst="rect">
             <a:avLst/>
@@ -3203,13 +3203,13 @@
           <a:p>
             <a:pPr algn="ctr"/>
             <a:r>
-              <a:rPr sz="2000" b="0" i="1">
-                <a:solidFill>
-                  <a:srgbClr val="8C8C8C"/>
+              <a:rPr sz="4800" b="1" i="0">
+                <a:solidFill>
+                  <a:srgbClr val="FFFFFF"/>
                 </a:solidFill>
                 <a:latin typeface="Arial"/>
               </a:rPr>
-              <a:t/>
+              <a:t>あなたは  勝利し</a:t>
             </a:r>
           </a:p>
         </p:txBody>
@@ -3222,8 +3222,8 @@
         </p:nvSpPr>
         <p:spPr>
           <a:xfrm>
-            <a:off x="594360" y="3529584"/>
-            <a:ext cx="11002975" cy="685800"/>
+            <a:off x="640080" y="3753612"/>
+            <a:ext cx="10911535" cy="365760"/>
           </a:xfrm>
           <a:prstGeom prst="rect">
             <a:avLst/>
@@ -3238,83 +3238,13 @@
           <a:p>
             <a:pPr algn="ctr"/>
             <a:r>
-              <a:rPr sz="4400" b="1" i="0">
-                <a:solidFill>
-                  <a:srgbClr val="FFFFFF"/>
-                </a:solidFill>
-                <a:latin typeface="Arial"/>
-              </a:rPr>
-              <a:t>あなたは  勝利し</a:t>
-            </a:r>
-          </a:p>
-        </p:txBody>
-      </p:sp>
-      <p:sp>
-        <p:nvSpPr>
-          <p:cNvPr id="6" name="TextBox 5"/>
-          <p:cNvSpPr txBox="1"/>
-          <p:nvPr/>
-        </p:nvSpPr>
-        <p:spPr>
-          <a:xfrm>
-            <a:off x="594360" y="4251960"/>
-            <a:ext cx="11002975" cy="384048"/>
-          </a:xfrm>
-          <a:prstGeom prst="rect">
-            <a:avLst/>
-          </a:prstGeom>
-          <a:noFill/>
-        </p:spPr>
-        <p:txBody>
-          <a:bodyPr wrap="square">
-            <a:spAutoFit/>
-          </a:bodyPr>
-          <a:lstStyle/>
-          <a:p>
-            <a:pPr algn="ctr"/>
-            <a:r>
               <a:rPr sz="2400" b="0" i="1">
                 <a:solidFill>
-                  <a:srgbClr val="B4B4B4"/>
+                  <a:srgbClr val="AAAAAA"/>
                 </a:solidFill>
                 <a:latin typeface="Arial"/>
               </a:rPr>
               <a:t>anata wa shourishi</a:t>
-            </a:r>
-          </a:p>
-        </p:txBody>
-      </p:sp>
-      <p:sp>
-        <p:nvSpPr>
-          <p:cNvPr id="7" name="TextBox 6"/>
-          <p:cNvSpPr txBox="1"/>
-          <p:nvPr/>
-        </p:nvSpPr>
-        <p:spPr>
-          <a:xfrm>
-            <a:off x="594360" y="4672584"/>
-            <a:ext cx="11002975" cy="347472"/>
-          </a:xfrm>
-          <a:prstGeom prst="rect">
-            <a:avLst/>
-          </a:prstGeom>
-          <a:noFill/>
-        </p:spPr>
-        <p:txBody>
-          <a:bodyPr wrap="square">
-            <a:spAutoFit/>
-          </a:bodyPr>
-          <a:lstStyle/>
-          <a:p>
-            <a:pPr algn="ctr"/>
-            <a:r>
-              <a:rPr sz="2000" b="0" i="1">
-                <a:solidFill>
-                  <a:srgbClr val="8C8C8C"/>
-                </a:solidFill>
-                <a:latin typeface="Arial"/>
-              </a:rPr>
-              <a:t/>
             </a:r>
           </a:p>
         </p:txBody>
@@ -3353,8 +3283,8 @@
         </p:nvSpPr>
         <p:spPr>
           <a:xfrm>
-            <a:off x="594360" y="2683764"/>
-            <a:ext cx="11002975" cy="685800"/>
+            <a:off x="640080" y="2500884"/>
+            <a:ext cx="10911535" cy="731520"/>
           </a:xfrm>
           <a:prstGeom prst="rect">
             <a:avLst/>
@@ -3369,7 +3299,7 @@
           <a:p>
             <a:pPr algn="ctr"/>
             <a:r>
-              <a:rPr sz="4400" b="1" i="0">
+              <a:rPr sz="4800" b="1" i="0">
                 <a:solidFill>
                   <a:srgbClr val="FFFFFF"/>
                 </a:solidFill>
@@ -3388,8 +3318,8 @@
         </p:nvSpPr>
         <p:spPr>
           <a:xfrm>
-            <a:off x="594360" y="3406140"/>
-            <a:ext cx="11002975" cy="384048"/>
+            <a:off x="640080" y="3268980"/>
+            <a:ext cx="10911535" cy="365760"/>
           </a:xfrm>
           <a:prstGeom prst="rect">
             <a:avLst/>
@@ -3406,7 +3336,7 @@
             <a:r>
               <a:rPr sz="2400" b="0" i="1">
                 <a:solidFill>
-                  <a:srgbClr val="B4B4B4"/>
+                  <a:srgbClr val="AAAAAA"/>
                 </a:solidFill>
                 <a:latin typeface="Arial"/>
               </a:rPr>
@@ -3423,8 +3353,8 @@
         </p:nvSpPr>
         <p:spPr>
           <a:xfrm>
-            <a:off x="594360" y="3826764"/>
-            <a:ext cx="11002975" cy="347472"/>
+            <a:off x="640080" y="4046220"/>
+            <a:ext cx="10911535" cy="310896"/>
           </a:xfrm>
           <a:prstGeom prst="rect">
             <a:avLst/>
@@ -3441,7 +3371,7 @@
             <a:r>
               <a:rPr sz="2000" b="0" i="1">
                 <a:solidFill>
-                  <a:srgbClr val="8C8C8C"/>
+                  <a:srgbClr val="828282"/>
                 </a:solidFill>
                 <a:latin typeface="Arial"/>
               </a:rPr>
@@ -3484,8 +3414,8 @@
         </p:nvSpPr>
         <p:spPr>
           <a:xfrm>
-            <a:off x="594360" y="2258568"/>
-            <a:ext cx="11002975" cy="685800"/>
+            <a:off x="640080" y="2052828"/>
+            <a:ext cx="10911535" cy="731520"/>
           </a:xfrm>
           <a:prstGeom prst="rect">
             <a:avLst/>
@@ -3500,7 +3430,7 @@
           <a:p>
             <a:pPr algn="ctr"/>
             <a:r>
-              <a:rPr sz="4400" b="1" i="0">
+              <a:rPr sz="4800" b="1" i="0">
                 <a:solidFill>
                   <a:srgbClr val="FFFFFF"/>
                 </a:solidFill>
@@ -3519,8 +3449,8 @@
         </p:nvSpPr>
         <p:spPr>
           <a:xfrm>
-            <a:off x="594360" y="2980944"/>
-            <a:ext cx="11002975" cy="347472"/>
+            <a:off x="640080" y="2985516"/>
+            <a:ext cx="10911535" cy="731520"/>
           </a:xfrm>
           <a:prstGeom prst="rect">
             <a:avLst/>
@@ -3535,13 +3465,13 @@
           <a:p>
             <a:pPr algn="ctr"/>
             <a:r>
-              <a:rPr sz="2200" b="0" i="1">
-                <a:solidFill>
-                  <a:srgbClr val="8C8C8C"/>
+              <a:rPr sz="4600" b="1" i="0">
+                <a:solidFill>
+                  <a:srgbClr val="FFFFFF"/>
                 </a:solidFill>
                 <a:latin typeface="Arial"/>
               </a:rPr>
-              <a:t>あなたの高く</a:t>
+              <a:t>Humilhado por uma cruz de pecados</a:t>
             </a:r>
           </a:p>
         </p:txBody>
@@ -3554,8 +3484,8 @@
         </p:nvSpPr>
         <p:spPr>
           <a:xfrm>
-            <a:off x="594360" y="3529584"/>
-            <a:ext cx="11002975" cy="685800"/>
+            <a:off x="640080" y="4128516"/>
+            <a:ext cx="10911535" cy="310896"/>
           </a:xfrm>
           <a:prstGeom prst="rect">
             <a:avLst/>
@@ -3570,13 +3500,13 @@
           <a:p>
             <a:pPr algn="ctr"/>
             <a:r>
-              <a:rPr sz="4266" b="1" i="0">
-                <a:solidFill>
-                  <a:srgbClr val="FFFFFF"/>
+              <a:rPr sz="2000" b="0" i="0">
+                <a:solidFill>
+                  <a:srgbClr val="828282"/>
                 </a:solidFill>
                 <a:latin typeface="Arial"/>
               </a:rPr>
-              <a:t>Humilhado por uma cruz de pecados</a:t>
+              <a:t>あなたの高く</a:t>
             </a:r>
           </a:p>
         </p:txBody>
@@ -3589,8 +3519,8 @@
         </p:nvSpPr>
         <p:spPr>
           <a:xfrm>
-            <a:off x="594360" y="4251960"/>
-            <a:ext cx="11002975" cy="347472"/>
+            <a:off x="640080" y="4494276"/>
+            <a:ext cx="10911535" cy="310896"/>
           </a:xfrm>
           <a:prstGeom prst="rect">
             <a:avLst/>
@@ -3605,9 +3535,9 @@
           <a:p>
             <a:pPr algn="ctr"/>
             <a:r>
-              <a:rPr sz="2200" b="0" i="1">
-                <a:solidFill>
-                  <a:srgbClr val="8C8C8C"/>
+              <a:rPr sz="2000" b="0" i="0">
+                <a:solidFill>
+                  <a:srgbClr val="828282"/>
                 </a:solidFill>
                 <a:latin typeface="Arial"/>
               </a:rPr>
@@ -3650,8 +3580,8 @@
         </p:nvSpPr>
         <p:spPr>
           <a:xfrm>
-            <a:off x="594360" y="2258568"/>
-            <a:ext cx="11002975" cy="685800"/>
+            <a:off x="640080" y="2052828"/>
+            <a:ext cx="10911535" cy="731520"/>
           </a:xfrm>
           <a:prstGeom prst="rect">
             <a:avLst/>
@@ -3666,7 +3596,7 @@
           <a:p>
             <a:pPr algn="ctr"/>
             <a:r>
-              <a:rPr sz="4400" b="1" i="0">
+              <a:rPr sz="4800" b="1" i="0">
                 <a:solidFill>
                   <a:srgbClr val="FFFFFF"/>
                 </a:solidFill>
@@ -3685,8 +3615,8 @@
         </p:nvSpPr>
         <p:spPr>
           <a:xfrm>
-            <a:off x="594360" y="2980944"/>
-            <a:ext cx="11002975" cy="347472"/>
+            <a:off x="640080" y="2985516"/>
+            <a:ext cx="10911535" cy="731520"/>
           </a:xfrm>
           <a:prstGeom prst="rect">
             <a:avLst/>
@@ -3701,13 +3631,13 @@
           <a:p>
             <a:pPr algn="ctr"/>
             <a:r>
-              <a:rPr sz="2200" b="0" i="1">
-                <a:solidFill>
-                  <a:srgbClr val="8C8C8C"/>
+              <a:rPr sz="4800" b="1" i="0">
+                <a:solidFill>
+                  <a:srgbClr val="FFFFFF"/>
                 </a:solidFill>
                 <a:latin typeface="Arial"/>
               </a:rPr>
-              <a:t>(繰り返し)</a:t>
+              <a:t>Através da tempestade</a:t>
             </a:r>
           </a:p>
         </p:txBody>
@@ -3720,8 +3650,8 @@
         </p:nvSpPr>
         <p:spPr>
           <a:xfrm>
-            <a:off x="594360" y="3529584"/>
-            <a:ext cx="11002975" cy="685800"/>
+            <a:off x="640080" y="4128516"/>
+            <a:ext cx="10911535" cy="310896"/>
           </a:xfrm>
           <a:prstGeom prst="rect">
             <a:avLst/>
@@ -3736,48 +3666,13 @@
           <a:p>
             <a:pPr algn="ctr"/>
             <a:r>
-              <a:rPr sz="4400" b="1" i="0">
-                <a:solidFill>
-                  <a:srgbClr val="FFFFFF"/>
+              <a:rPr sz="2000" b="0" i="0">
+                <a:solidFill>
+                  <a:srgbClr val="828282"/>
                 </a:solidFill>
                 <a:latin typeface="Arial"/>
               </a:rPr>
-              <a:t>Através da tempestade</a:t>
-            </a:r>
-          </a:p>
-        </p:txBody>
-      </p:sp>
-      <p:sp>
-        <p:nvSpPr>
-          <p:cNvPr id="5" name="TextBox 4"/>
-          <p:cNvSpPr txBox="1"/>
-          <p:nvPr/>
-        </p:nvSpPr>
-        <p:spPr>
-          <a:xfrm>
-            <a:off x="594360" y="4251960"/>
-            <a:ext cx="11002975" cy="347472"/>
-          </a:xfrm>
-          <a:prstGeom prst="rect">
-            <a:avLst/>
-          </a:prstGeom>
-          <a:noFill/>
-        </p:spPr>
-        <p:txBody>
-          <a:bodyPr wrap="square">
-            <a:spAutoFit/>
-          </a:bodyPr>
-          <a:lstStyle/>
-          <a:p>
-            <a:pPr algn="ctr"/>
-            <a:r>
-              <a:rPr sz="2200" b="0" i="1">
-                <a:solidFill>
-                  <a:srgbClr val="8C8C8C"/>
-                </a:solidFill>
-                <a:latin typeface="Arial"/>
-              </a:rPr>
-              <a:t/>
+              <a:t>(繰り返し)</a:t>
             </a:r>
           </a:p>
         </p:txBody>
@@ -3816,8 +3711,8 @@
         </p:nvSpPr>
         <p:spPr>
           <a:xfrm>
-            <a:off x="594360" y="2258568"/>
-            <a:ext cx="11002975" cy="685800"/>
+            <a:off x="640080" y="2052828"/>
+            <a:ext cx="10911535" cy="731520"/>
           </a:xfrm>
           <a:prstGeom prst="rect">
             <a:avLst/>
@@ -3832,7 +3727,7 @@
           <a:p>
             <a:pPr algn="ctr"/>
             <a:r>
-              <a:rPr sz="4400" b="1" i="0">
+              <a:rPr sz="4800" b="1" i="0">
                 <a:solidFill>
                   <a:srgbClr val="FFFFFF"/>
                 </a:solidFill>
@@ -3851,8 +3746,8 @@
         </p:nvSpPr>
         <p:spPr>
           <a:xfrm>
-            <a:off x="594360" y="2980944"/>
-            <a:ext cx="11002975" cy="347472"/>
+            <a:off x="640080" y="2985516"/>
+            <a:ext cx="10911535" cy="731520"/>
           </a:xfrm>
           <a:prstGeom prst="rect">
             <a:avLst/>
@@ -3867,83 +3762,13 @@
           <a:p>
             <a:pPr algn="ctr"/>
             <a:r>
-              <a:rPr sz="2200" b="0" i="1">
-                <a:solidFill>
-                  <a:srgbClr val="8C8C8C"/>
-                </a:solidFill>
-                <a:latin typeface="Arial"/>
-              </a:rPr>
-              <a:t/>
-            </a:r>
-          </a:p>
-        </p:txBody>
-      </p:sp>
-      <p:sp>
-        <p:nvSpPr>
-          <p:cNvPr id="4" name="TextBox 3"/>
-          <p:cNvSpPr txBox="1"/>
-          <p:nvPr/>
-        </p:nvSpPr>
-        <p:spPr>
-          <a:xfrm>
-            <a:off x="594360" y="3529584"/>
-            <a:ext cx="11002975" cy="685800"/>
-          </a:xfrm>
-          <a:prstGeom prst="rect">
-            <a:avLst/>
-          </a:prstGeom>
-          <a:noFill/>
-        </p:spPr>
-        <p:txBody>
-          <a:bodyPr wrap="square">
-            <a:spAutoFit/>
-          </a:bodyPr>
-          <a:lstStyle/>
-          <a:p>
-            <a:pPr algn="ctr"/>
-            <a:r>
-              <a:rPr sz="4400" b="1" i="0">
+              <a:rPr sz="4800" b="1" i="0">
                 <a:solidFill>
                   <a:srgbClr val="FFFFFF"/>
                 </a:solidFill>
                 <a:latin typeface="Arial"/>
               </a:rPr>
               <a:t>Há a verdade que me torna livre</a:t>
-            </a:r>
-          </a:p>
-        </p:txBody>
-      </p:sp>
-      <p:sp>
-        <p:nvSpPr>
-          <p:cNvPr id="5" name="TextBox 4"/>
-          <p:cNvSpPr txBox="1"/>
-          <p:nvPr/>
-        </p:nvSpPr>
-        <p:spPr>
-          <a:xfrm>
-            <a:off x="594360" y="4251960"/>
-            <a:ext cx="11002975" cy="347472"/>
-          </a:xfrm>
-          <a:prstGeom prst="rect">
-            <a:avLst/>
-          </a:prstGeom>
-          <a:noFill/>
-        </p:spPr>
-        <p:txBody>
-          <a:bodyPr wrap="square">
-            <a:spAutoFit/>
-          </a:bodyPr>
-          <a:lstStyle/>
-          <a:p>
-            <a:pPr algn="ctr"/>
-            <a:r>
-              <a:rPr sz="2200" b="0" i="1">
-                <a:solidFill>
-                  <a:srgbClr val="8C8C8C"/>
-                </a:solidFill>
-                <a:latin typeface="Arial"/>
-              </a:rPr>
-              <a:t/>
             </a:r>
           </a:p>
         </p:txBody>
@@ -3982,8 +3807,8 @@
         </p:nvSpPr>
         <p:spPr>
           <a:xfrm>
-            <a:off x="594360" y="2258568"/>
-            <a:ext cx="11002975" cy="685800"/>
+            <a:off x="640080" y="2052828"/>
+            <a:ext cx="10911535" cy="731520"/>
           </a:xfrm>
           <a:prstGeom prst="rect">
             <a:avLst/>
@@ -3998,7 +3823,7 @@
           <a:p>
             <a:pPr algn="ctr"/>
             <a:r>
-              <a:rPr sz="4400" b="1" i="0">
+              <a:rPr sz="4800" b="1" i="0">
                 <a:solidFill>
                   <a:srgbClr val="FFFFFF"/>
                 </a:solidFill>
@@ -4017,8 +3842,8 @@
         </p:nvSpPr>
         <p:spPr>
           <a:xfrm>
-            <a:off x="594360" y="2980944"/>
-            <a:ext cx="11002975" cy="347472"/>
+            <a:off x="640080" y="2985516"/>
+            <a:ext cx="10911535" cy="731520"/>
           </a:xfrm>
           <a:prstGeom prst="rect">
             <a:avLst/>
@@ -4033,83 +3858,13 @@
           <a:p>
             <a:pPr algn="ctr"/>
             <a:r>
-              <a:rPr sz="2200" b="0" i="1">
-                <a:solidFill>
-                  <a:srgbClr val="8C8C8C"/>
-                </a:solidFill>
-                <a:latin typeface="Arial"/>
-              </a:rPr>
-              <a:t/>
-            </a:r>
-          </a:p>
-        </p:txBody>
-      </p:sp>
-      <p:sp>
-        <p:nvSpPr>
-          <p:cNvPr id="4" name="TextBox 3"/>
-          <p:cNvSpPr txBox="1"/>
-          <p:nvPr/>
-        </p:nvSpPr>
-        <p:spPr>
-          <a:xfrm>
-            <a:off x="594360" y="3529584"/>
-            <a:ext cx="11002975" cy="685800"/>
-          </a:xfrm>
-          <a:prstGeom prst="rect">
-            <a:avLst/>
-          </a:prstGeom>
-          <a:noFill/>
-        </p:spPr>
-        <p:txBody>
-          <a:bodyPr wrap="square">
-            <a:spAutoFit/>
-          </a:bodyPr>
-          <a:lstStyle/>
-          <a:p>
-            <a:pPr algn="ctr"/>
-            <a:r>
-              <a:rPr sz="4400" b="1" i="0">
+              <a:rPr sz="4800" b="1" i="0">
                 <a:solidFill>
                   <a:srgbClr val="FFFFFF"/>
                 </a:solidFill>
                 <a:latin typeface="Arial"/>
               </a:rPr>
               <a:t>Você é mais forte</a:t>
-            </a:r>
-          </a:p>
-        </p:txBody>
-      </p:sp>
-      <p:sp>
-        <p:nvSpPr>
-          <p:cNvPr id="5" name="TextBox 4"/>
-          <p:cNvSpPr txBox="1"/>
-          <p:nvPr/>
-        </p:nvSpPr>
-        <p:spPr>
-          <a:xfrm>
-            <a:off x="594360" y="4251960"/>
-            <a:ext cx="11002975" cy="347472"/>
-          </a:xfrm>
-          <a:prstGeom prst="rect">
-            <a:avLst/>
-          </a:prstGeom>
-          <a:noFill/>
-        </p:spPr>
-        <p:txBody>
-          <a:bodyPr wrap="square">
-            <a:spAutoFit/>
-          </a:bodyPr>
-          <a:lstStyle/>
-          <a:p>
-            <a:pPr algn="ctr"/>
-            <a:r>
-              <a:rPr sz="2200" b="0" i="1">
-                <a:solidFill>
-                  <a:srgbClr val="8C8C8C"/>
-                </a:solidFill>
-                <a:latin typeface="Arial"/>
-              </a:rPr>
-              <a:t/>
             </a:r>
           </a:p>
         </p:txBody>
@@ -4148,8 +3903,8 @@
         </p:nvSpPr>
         <p:spPr>
           <a:xfrm>
-            <a:off x="594360" y="2683764"/>
-            <a:ext cx="11002975" cy="685800"/>
+            <a:off x="640080" y="2500884"/>
+            <a:ext cx="10911535" cy="731520"/>
           </a:xfrm>
           <a:prstGeom prst="rect">
             <a:avLst/>
@@ -4164,7 +3919,7 @@
           <a:p>
             <a:pPr algn="ctr"/>
             <a:r>
-              <a:rPr sz="4400" b="1" i="0">
+              <a:rPr sz="4800" b="1" i="0">
                 <a:solidFill>
                   <a:srgbClr val="FFFFFF"/>
                 </a:solidFill>
@@ -4183,8 +3938,8 @@
         </p:nvSpPr>
         <p:spPr>
           <a:xfrm>
-            <a:off x="594360" y="3406140"/>
-            <a:ext cx="11002975" cy="384048"/>
+            <a:off x="640080" y="3268980"/>
+            <a:ext cx="10911535" cy="365760"/>
           </a:xfrm>
           <a:prstGeom prst="rect">
             <a:avLst/>
@@ -4201,46 +3956,11 @@
             <a:r>
               <a:rPr sz="2400" b="0" i="1">
                 <a:solidFill>
-                  <a:srgbClr val="B4B4B4"/>
+                  <a:srgbClr val="AAAAAA"/>
                 </a:solidFill>
                 <a:latin typeface="Arial"/>
               </a:rPr>
               <a:t>futatabi yomigaeru</a:t>
-            </a:r>
-          </a:p>
-        </p:txBody>
-      </p:sp>
-      <p:sp>
-        <p:nvSpPr>
-          <p:cNvPr id="4" name="TextBox 3"/>
-          <p:cNvSpPr txBox="1"/>
-          <p:nvPr/>
-        </p:nvSpPr>
-        <p:spPr>
-          <a:xfrm>
-            <a:off x="594360" y="3826764"/>
-            <a:ext cx="11002975" cy="347472"/>
-          </a:xfrm>
-          <a:prstGeom prst="rect">
-            <a:avLst/>
-          </a:prstGeom>
-          <a:noFill/>
-        </p:spPr>
-        <p:txBody>
-          <a:bodyPr wrap="square">
-            <a:spAutoFit/>
-          </a:bodyPr>
-          <a:lstStyle/>
-          <a:p>
-            <a:pPr algn="ctr"/>
-            <a:r>
-              <a:rPr sz="2000" b="0" i="1">
-                <a:solidFill>
-                  <a:srgbClr val="8C8C8C"/>
-                </a:solidFill>
-                <a:latin typeface="Arial"/>
-              </a:rPr>
-              <a:t/>
             </a:r>
           </a:p>
         </p:txBody>
@@ -4279,8 +3999,8 @@
         </p:nvSpPr>
         <p:spPr>
           <a:xfrm>
-            <a:off x="594360" y="1837944"/>
-            <a:ext cx="11002975" cy="685800"/>
+            <a:off x="640080" y="1650492"/>
+            <a:ext cx="10911535" cy="731520"/>
           </a:xfrm>
           <a:prstGeom prst="rect">
             <a:avLst/>
@@ -4295,7 +4015,7 @@
           <a:p>
             <a:pPr algn="ctr"/>
             <a:r>
-              <a:rPr sz="4400" b="1" i="0">
+              <a:rPr sz="4800" b="1" i="0">
                 <a:solidFill>
                   <a:srgbClr val="FFFFFF"/>
                 </a:solidFill>
@@ -4314,8 +4034,8 @@
         </p:nvSpPr>
         <p:spPr>
           <a:xfrm>
-            <a:off x="594360" y="2560320"/>
-            <a:ext cx="11002975" cy="384048"/>
+            <a:off x="640080" y="2418588"/>
+            <a:ext cx="10911535" cy="365760"/>
           </a:xfrm>
           <a:prstGeom prst="rect">
             <a:avLst/>
@@ -4332,7 +4052,7 @@
             <a:r>
               <a:rPr sz="2400" b="0" i="1">
                 <a:solidFill>
-                  <a:srgbClr val="B4B4B4"/>
+                  <a:srgbClr val="AAAAAA"/>
                 </a:solidFill>
                 <a:latin typeface="Arial"/>
               </a:rPr>
@@ -4349,8 +4069,8 @@
         </p:nvSpPr>
         <p:spPr>
           <a:xfrm>
-            <a:off x="594360" y="2980944"/>
-            <a:ext cx="11002975" cy="347472"/>
+            <a:off x="640080" y="2985516"/>
+            <a:ext cx="10911535" cy="731520"/>
           </a:xfrm>
           <a:prstGeom prst="rect">
             <a:avLst/>
@@ -4365,13 +4085,13 @@
           <a:p>
             <a:pPr algn="ctr"/>
             <a:r>
-              <a:rPr sz="2000" b="0" i="1">
-                <a:solidFill>
-                  <a:srgbClr val="8C8C8C"/>
+              <a:rPr sz="4800" b="1" i="0">
+                <a:solidFill>
+                  <a:srgbClr val="FFFFFF"/>
                 </a:solidFill>
                 <a:latin typeface="Arial"/>
               </a:rPr>
-              <a:t/>
+              <a:t>自由をくれる    イエスが  生きてる</a:t>
             </a:r>
           </a:p>
         </p:txBody>
@@ -4384,8 +4104,8 @@
         </p:nvSpPr>
         <p:spPr>
           <a:xfrm>
-            <a:off x="594360" y="3529584"/>
-            <a:ext cx="11002975" cy="685800"/>
+            <a:off x="640080" y="3753612"/>
+            <a:ext cx="10911535" cy="365760"/>
           </a:xfrm>
           <a:prstGeom prst="rect">
             <a:avLst/>
@@ -4400,83 +4120,13 @@
           <a:p>
             <a:pPr algn="ctr"/>
             <a:r>
-              <a:rPr sz="4400" b="1" i="0">
-                <a:solidFill>
-                  <a:srgbClr val="FFFFFF"/>
-                </a:solidFill>
-                <a:latin typeface="Arial"/>
-              </a:rPr>
-              <a:t>自由をくれる    イエスが  生きてる</a:t>
-            </a:r>
-          </a:p>
-        </p:txBody>
-      </p:sp>
-      <p:sp>
-        <p:nvSpPr>
-          <p:cNvPr id="6" name="TextBox 5"/>
-          <p:cNvSpPr txBox="1"/>
-          <p:nvPr/>
-        </p:nvSpPr>
-        <p:spPr>
-          <a:xfrm>
-            <a:off x="594360" y="4251960"/>
-            <a:ext cx="11002975" cy="384048"/>
-          </a:xfrm>
-          <a:prstGeom prst="rect">
-            <a:avLst/>
-          </a:prstGeom>
-          <a:noFill/>
-        </p:spPr>
-        <p:txBody>
-          <a:bodyPr wrap="square">
-            <a:spAutoFit/>
-          </a:bodyPr>
-          <a:lstStyle/>
-          <a:p>
-            <a:pPr algn="ctr"/>
-            <a:r>
               <a:rPr sz="2400" b="0" i="1">
                 <a:solidFill>
-                  <a:srgbClr val="B4B4B4"/>
+                  <a:srgbClr val="AAAAAA"/>
                 </a:solidFill>
                 <a:latin typeface="Arial"/>
               </a:rPr>
               <a:t>jiyuu wo kureru   iesu ga ikiteru</a:t>
-            </a:r>
-          </a:p>
-        </p:txBody>
-      </p:sp>
-      <p:sp>
-        <p:nvSpPr>
-          <p:cNvPr id="7" name="TextBox 6"/>
-          <p:cNvSpPr txBox="1"/>
-          <p:nvPr/>
-        </p:nvSpPr>
-        <p:spPr>
-          <a:xfrm>
-            <a:off x="594360" y="4672584"/>
-            <a:ext cx="11002975" cy="347472"/>
-          </a:xfrm>
-          <a:prstGeom prst="rect">
-            <a:avLst/>
-          </a:prstGeom>
-          <a:noFill/>
-        </p:spPr>
-        <p:txBody>
-          <a:bodyPr wrap="square">
-            <a:spAutoFit/>
-          </a:bodyPr>
-          <a:lstStyle/>
-          <a:p>
-            <a:pPr algn="ctr"/>
-            <a:r>
-              <a:rPr sz="2000" b="0" i="1">
-                <a:solidFill>
-                  <a:srgbClr val="8C8C8C"/>
-                </a:solidFill>
-                <a:latin typeface="Arial"/>
-              </a:rPr>
-              <a:t/>
             </a:r>
           </a:p>
         </p:txBody>
@@ -4515,8 +4165,8 @@
         </p:nvSpPr>
         <p:spPr>
           <a:xfrm>
-            <a:off x="594360" y="1837944"/>
-            <a:ext cx="11002975" cy="685800"/>
+            <a:off x="640080" y="1650492"/>
+            <a:ext cx="10911535" cy="731520"/>
           </a:xfrm>
           <a:prstGeom prst="rect">
             <a:avLst/>
@@ -4531,7 +4181,7 @@
           <a:p>
             <a:pPr algn="ctr"/>
             <a:r>
-              <a:rPr sz="4400" b="1" i="0">
+              <a:rPr sz="4800" b="1" i="0">
                 <a:solidFill>
                   <a:srgbClr val="FFFFFF"/>
                 </a:solidFill>
@@ -4550,8 +4200,8 @@
         </p:nvSpPr>
         <p:spPr>
           <a:xfrm>
-            <a:off x="594360" y="2560320"/>
-            <a:ext cx="11002975" cy="384048"/>
+            <a:off x="640080" y="2418588"/>
+            <a:ext cx="10911535" cy="365760"/>
           </a:xfrm>
           <a:prstGeom prst="rect">
             <a:avLst/>
@@ -4568,7 +4218,7 @@
             <a:r>
               <a:rPr sz="2400" b="0" i="1">
                 <a:solidFill>
-                  <a:srgbClr val="B4B4B4"/>
+                  <a:srgbClr val="AAAAAA"/>
                 </a:solidFill>
                 <a:latin typeface="Arial"/>
               </a:rPr>
@@ -4585,8 +4235,8 @@
         </p:nvSpPr>
         <p:spPr>
           <a:xfrm>
-            <a:off x="594360" y="2980944"/>
-            <a:ext cx="11002975" cy="347472"/>
+            <a:off x="640080" y="2985516"/>
+            <a:ext cx="10911535" cy="731520"/>
           </a:xfrm>
           <a:prstGeom prst="rect">
             <a:avLst/>
@@ -4601,13 +4251,13 @@
           <a:p>
             <a:pPr algn="ctr"/>
             <a:r>
-              <a:rPr sz="2000" b="0" i="1">
-                <a:solidFill>
-                  <a:srgbClr val="8C8C8C"/>
+              <a:rPr sz="4800" b="1" i="0">
+                <a:solidFill>
+                  <a:srgbClr val="FFFFFF"/>
                 </a:solidFill>
                 <a:latin typeface="Arial"/>
               </a:rPr>
-              <a:t/>
+              <a:t>罪砕き  救った</a:t>
             </a:r>
           </a:p>
         </p:txBody>
@@ -4620,8 +4270,8 @@
         </p:nvSpPr>
         <p:spPr>
           <a:xfrm>
-            <a:off x="594360" y="3529584"/>
-            <a:ext cx="11002975" cy="685800"/>
+            <a:off x="640080" y="3753612"/>
+            <a:ext cx="10911535" cy="365760"/>
           </a:xfrm>
           <a:prstGeom prst="rect">
             <a:avLst/>
@@ -4636,83 +4286,13 @@
           <a:p>
             <a:pPr algn="ctr"/>
             <a:r>
-              <a:rPr sz="4400" b="1" i="0">
-                <a:solidFill>
-                  <a:srgbClr val="FFFFFF"/>
-                </a:solidFill>
-                <a:latin typeface="Arial"/>
-              </a:rPr>
-              <a:t>罪砕き  救った</a:t>
-            </a:r>
-          </a:p>
-        </p:txBody>
-      </p:sp>
-      <p:sp>
-        <p:nvSpPr>
-          <p:cNvPr id="6" name="TextBox 5"/>
-          <p:cNvSpPr txBox="1"/>
-          <p:nvPr/>
-        </p:nvSpPr>
-        <p:spPr>
-          <a:xfrm>
-            <a:off x="594360" y="4251960"/>
-            <a:ext cx="11002975" cy="384048"/>
-          </a:xfrm>
-          <a:prstGeom prst="rect">
-            <a:avLst/>
-          </a:prstGeom>
-          <a:noFill/>
-        </p:spPr>
-        <p:txBody>
-          <a:bodyPr wrap="square">
-            <a:spAutoFit/>
-          </a:bodyPr>
-          <a:lstStyle/>
-          <a:p>
-            <a:pPr algn="ctr"/>
-            <a:r>
               <a:rPr sz="2400" b="0" i="1">
                 <a:solidFill>
-                  <a:srgbClr val="B4B4B4"/>
+                  <a:srgbClr val="AAAAAA"/>
                 </a:solidFill>
                 <a:latin typeface="Arial"/>
               </a:rPr>
               <a:t>tsumi kudaki sukuuta</a:t>
-            </a:r>
-          </a:p>
-        </p:txBody>
-      </p:sp>
-      <p:sp>
-        <p:nvSpPr>
-          <p:cNvPr id="7" name="TextBox 6"/>
-          <p:cNvSpPr txBox="1"/>
-          <p:nvPr/>
-        </p:nvSpPr>
-        <p:spPr>
-          <a:xfrm>
-            <a:off x="594360" y="4672584"/>
-            <a:ext cx="11002975" cy="347472"/>
-          </a:xfrm>
-          <a:prstGeom prst="rect">
-            <a:avLst/>
-          </a:prstGeom>
-          <a:noFill/>
-        </p:spPr>
-        <p:txBody>
-          <a:bodyPr wrap="square">
-            <a:spAutoFit/>
-          </a:bodyPr>
-          <a:lstStyle/>
-          <a:p>
-            <a:pPr algn="ctr"/>
-            <a:r>
-              <a:rPr sz="2000" b="0" i="1">
-                <a:solidFill>
-                  <a:srgbClr val="8C8C8C"/>
-                </a:solidFill>
-                <a:latin typeface="Arial"/>
-              </a:rPr>
-              <a:t/>
             </a:r>
           </a:p>
         </p:txBody>
@@ -4751,8 +4331,8 @@
         </p:nvSpPr>
         <p:spPr>
           <a:xfrm>
-            <a:off x="594360" y="1837944"/>
-            <a:ext cx="11002975" cy="685800"/>
+            <a:off x="640080" y="1650492"/>
+            <a:ext cx="10911535" cy="731520"/>
           </a:xfrm>
           <a:prstGeom prst="rect">
             <a:avLst/>
@@ -4767,7 +4347,7 @@
           <a:p>
             <a:pPr algn="ctr"/>
             <a:r>
-              <a:rPr sz="4400" b="1" i="0">
+              <a:rPr sz="4800" b="1" i="0">
                 <a:solidFill>
                   <a:srgbClr val="FFFFFF"/>
                 </a:solidFill>
@@ -4786,8 +4366,8 @@
         </p:nvSpPr>
         <p:spPr>
           <a:xfrm>
-            <a:off x="594360" y="2560320"/>
-            <a:ext cx="11002975" cy="384048"/>
+            <a:off x="640080" y="2418588"/>
+            <a:ext cx="10911535" cy="365760"/>
           </a:xfrm>
           <a:prstGeom prst="rect">
             <a:avLst/>
@@ -4804,7 +4384,7 @@
             <a:r>
               <a:rPr sz="2400" b="0" i="1">
                 <a:solidFill>
-                  <a:srgbClr val="B4B4B4"/>
+                  <a:srgbClr val="AAAAAA"/>
                 </a:solidFill>
                 <a:latin typeface="Arial"/>
               </a:rPr>
@@ -4821,8 +4401,8 @@
         </p:nvSpPr>
         <p:spPr>
           <a:xfrm>
-            <a:off x="594360" y="2980944"/>
-            <a:ext cx="11002975" cy="347472"/>
+            <a:off x="640080" y="2985516"/>
+            <a:ext cx="10911535" cy="731520"/>
           </a:xfrm>
           <a:prstGeom prst="rect">
             <a:avLst/>
@@ -4837,13 +4417,13 @@
           <a:p>
             <a:pPr algn="ctr"/>
             <a:r>
-              <a:rPr sz="2000" b="0" i="1">
-                <a:solidFill>
-                  <a:srgbClr val="8C8C8C"/>
+              <a:rPr sz="4800" b="1" i="0">
+                <a:solidFill>
+                  <a:srgbClr val="FFFFFF"/>
                 </a:solidFill>
                 <a:latin typeface="Arial"/>
               </a:rPr>
-              <a:t/>
+              <a:t>イエス  救いの主</a:t>
             </a:r>
           </a:p>
         </p:txBody>
@@ -4856,8 +4436,8 @@
         </p:nvSpPr>
         <p:spPr>
           <a:xfrm>
-            <a:off x="594360" y="3529584"/>
-            <a:ext cx="11002975" cy="685800"/>
+            <a:off x="640080" y="3753612"/>
+            <a:ext cx="10911535" cy="365760"/>
           </a:xfrm>
           <a:prstGeom prst="rect">
             <a:avLst/>
@@ -4872,83 +4452,13 @@
           <a:p>
             <a:pPr algn="ctr"/>
             <a:r>
-              <a:rPr sz="4400" b="1" i="0">
-                <a:solidFill>
-                  <a:srgbClr val="FFFFFF"/>
-                </a:solidFill>
-                <a:latin typeface="Arial"/>
-              </a:rPr>
-              <a:t>イエス  救いの主</a:t>
-            </a:r>
-          </a:p>
-        </p:txBody>
-      </p:sp>
-      <p:sp>
-        <p:nvSpPr>
-          <p:cNvPr id="6" name="TextBox 5"/>
-          <p:cNvSpPr txBox="1"/>
-          <p:nvPr/>
-        </p:nvSpPr>
-        <p:spPr>
-          <a:xfrm>
-            <a:off x="594360" y="4251960"/>
-            <a:ext cx="11002975" cy="384048"/>
-          </a:xfrm>
-          <a:prstGeom prst="rect">
-            <a:avLst/>
-          </a:prstGeom>
-          <a:noFill/>
-        </p:spPr>
-        <p:txBody>
-          <a:bodyPr wrap="square">
-            <a:spAutoFit/>
-          </a:bodyPr>
-          <a:lstStyle/>
-          <a:p>
-            <a:pPr algn="ctr"/>
-            <a:r>
               <a:rPr sz="2400" b="0" i="1">
                 <a:solidFill>
-                  <a:srgbClr val="B4B4B4"/>
+                  <a:srgbClr val="AAAAAA"/>
                 </a:solidFill>
                 <a:latin typeface="Arial"/>
               </a:rPr>
               <a:t>iesu sukui no shu</a:t>
-            </a:r>
-          </a:p>
-        </p:txBody>
-      </p:sp>
-      <p:sp>
-        <p:nvSpPr>
-          <p:cNvPr id="7" name="TextBox 6"/>
-          <p:cNvSpPr txBox="1"/>
-          <p:nvPr/>
-        </p:nvSpPr>
-        <p:spPr>
-          <a:xfrm>
-            <a:off x="594360" y="4672584"/>
-            <a:ext cx="11002975" cy="347472"/>
-          </a:xfrm>
-          <a:prstGeom prst="rect">
-            <a:avLst/>
-          </a:prstGeom>
-          <a:noFill/>
-        </p:spPr>
-        <p:txBody>
-          <a:bodyPr wrap="square">
-            <a:spAutoFit/>
-          </a:bodyPr>
-          <a:lstStyle/>
-          <a:p>
-            <a:pPr algn="ctr"/>
-            <a:r>
-              <a:rPr sz="2000" b="0" i="1">
-                <a:solidFill>
-                  <a:srgbClr val="8C8C8C"/>
-                </a:solidFill>
-                <a:latin typeface="Arial"/>
-              </a:rPr>
-              <a:t/>
             </a:r>
           </a:p>
         </p:txBody>
@@ -4987,8 +4497,8 @@
         </p:nvSpPr>
         <p:spPr>
           <a:xfrm>
-            <a:off x="594360" y="1837944"/>
-            <a:ext cx="11002975" cy="685800"/>
+            <a:off x="640080" y="1650492"/>
+            <a:ext cx="10911535" cy="731520"/>
           </a:xfrm>
           <a:prstGeom prst="rect">
             <a:avLst/>
@@ -5003,7 +4513,7 @@
           <a:p>
             <a:pPr algn="ctr"/>
             <a:r>
-              <a:rPr sz="4400" b="1" i="0">
+              <a:rPr sz="4800" b="1" i="0">
                 <a:solidFill>
                   <a:srgbClr val="FFFFFF"/>
                 </a:solidFill>
@@ -5022,8 +4532,8 @@
         </p:nvSpPr>
         <p:spPr>
           <a:xfrm>
-            <a:off x="594360" y="2560320"/>
-            <a:ext cx="11002975" cy="384048"/>
+            <a:off x="640080" y="2418588"/>
+            <a:ext cx="10911535" cy="365760"/>
           </a:xfrm>
           <a:prstGeom prst="rect">
             <a:avLst/>
@@ -5040,7 +4550,7 @@
             <a:r>
               <a:rPr sz="2400" b="0" i="1">
                 <a:solidFill>
-                  <a:srgbClr val="B4B4B4"/>
+                  <a:srgbClr val="AAAAAA"/>
                 </a:solidFill>
                 <a:latin typeface="Arial"/>
               </a:rPr>
@@ -5057,8 +4567,8 @@
         </p:nvSpPr>
         <p:spPr>
           <a:xfrm>
-            <a:off x="594360" y="2980944"/>
-            <a:ext cx="11002975" cy="347472"/>
+            <a:off x="640080" y="2985516"/>
+            <a:ext cx="10911535" cy="731520"/>
           </a:xfrm>
           <a:prstGeom prst="rect">
             <a:avLst/>
@@ -5073,13 +4583,13 @@
           <a:p>
             <a:pPr algn="ctr"/>
             <a:r>
-              <a:rPr sz="2000" b="0" i="1">
-                <a:solidFill>
-                  <a:srgbClr val="8C8C8C"/>
+              <a:rPr sz="4800" b="1" i="0">
+                <a:solidFill>
+                  <a:srgbClr val="FFFFFF"/>
                 </a:solidFill>
                 <a:latin typeface="Arial"/>
               </a:rPr>
-              <a:t/>
+              <a:t>たましい救うため      背負った  十字架</a:t>
             </a:r>
           </a:p>
         </p:txBody>
@@ -5092,8 +4602,8 @@
         </p:nvSpPr>
         <p:spPr>
           <a:xfrm>
-            <a:off x="594360" y="3529584"/>
-            <a:ext cx="11002975" cy="685800"/>
+            <a:off x="640080" y="3753612"/>
+            <a:ext cx="10911535" cy="365760"/>
           </a:xfrm>
           <a:prstGeom prst="rect">
             <a:avLst/>
@@ -5108,83 +4618,13 @@
           <a:p>
             <a:pPr algn="ctr"/>
             <a:r>
-              <a:rPr sz="4400" b="1" i="0">
-                <a:solidFill>
-                  <a:srgbClr val="FFFFFF"/>
-                </a:solidFill>
-                <a:latin typeface="Arial"/>
-              </a:rPr>
-              <a:t>たましい救うため      背負った  十字架</a:t>
-            </a:r>
-          </a:p>
-        </p:txBody>
-      </p:sp>
-      <p:sp>
-        <p:nvSpPr>
-          <p:cNvPr id="6" name="TextBox 5"/>
-          <p:cNvSpPr txBox="1"/>
-          <p:nvPr/>
-        </p:nvSpPr>
-        <p:spPr>
-          <a:xfrm>
-            <a:off x="594360" y="4251960"/>
-            <a:ext cx="11002975" cy="384048"/>
-          </a:xfrm>
-          <a:prstGeom prst="rect">
-            <a:avLst/>
-          </a:prstGeom>
-          <a:noFill/>
-        </p:spPr>
-        <p:txBody>
-          <a:bodyPr wrap="square">
-            <a:spAutoFit/>
-          </a:bodyPr>
-          <a:lstStyle/>
-          <a:p>
-            <a:pPr algn="ctr"/>
-            <a:r>
               <a:rPr sz="2400" b="0" i="1">
                 <a:solidFill>
-                  <a:srgbClr val="B4B4B4"/>
+                  <a:srgbClr val="AAAAAA"/>
                 </a:solidFill>
                 <a:latin typeface="Arial"/>
               </a:rPr>
               <a:t>tamashii sukuutame  seoutta jyuujika</a:t>
-            </a:r>
-          </a:p>
-        </p:txBody>
-      </p:sp>
-      <p:sp>
-        <p:nvSpPr>
-          <p:cNvPr id="7" name="TextBox 6"/>
-          <p:cNvSpPr txBox="1"/>
-          <p:nvPr/>
-        </p:nvSpPr>
-        <p:spPr>
-          <a:xfrm>
-            <a:off x="594360" y="4672584"/>
-            <a:ext cx="11002975" cy="347472"/>
-          </a:xfrm>
-          <a:prstGeom prst="rect">
-            <a:avLst/>
-          </a:prstGeom>
-          <a:noFill/>
-        </p:spPr>
-        <p:txBody>
-          <a:bodyPr wrap="square">
-            <a:spAutoFit/>
-          </a:bodyPr>
-          <a:lstStyle/>
-          <a:p>
-            <a:pPr algn="ctr"/>
-            <a:r>
-              <a:rPr sz="2000" b="0" i="1">
-                <a:solidFill>
-                  <a:srgbClr val="8C8C8C"/>
-                </a:solidFill>
-                <a:latin typeface="Arial"/>
-              </a:rPr>
-              <a:t/>
             </a:r>
           </a:p>
         </p:txBody>
@@ -5223,8 +4663,8 @@
         </p:nvSpPr>
         <p:spPr>
           <a:xfrm>
-            <a:off x="594360" y="1837944"/>
-            <a:ext cx="11002975" cy="685800"/>
+            <a:off x="640080" y="1650492"/>
+            <a:ext cx="10911535" cy="731520"/>
           </a:xfrm>
           <a:prstGeom prst="rect">
             <a:avLst/>
@@ -5239,7 +4679,7 @@
           <a:p>
             <a:pPr algn="ctr"/>
             <a:r>
-              <a:rPr sz="4400" b="1" i="0">
+              <a:rPr sz="4800" b="1" i="0">
                 <a:solidFill>
                   <a:srgbClr val="FFFFFF"/>
                 </a:solidFill>
@@ -5258,8 +4698,8 @@
         </p:nvSpPr>
         <p:spPr>
           <a:xfrm>
-            <a:off x="594360" y="2560320"/>
-            <a:ext cx="11002975" cy="384048"/>
+            <a:off x="640080" y="2418588"/>
+            <a:ext cx="10911535" cy="365760"/>
           </a:xfrm>
           <a:prstGeom prst="rect">
             <a:avLst/>
@@ -5276,7 +4716,7 @@
             <a:r>
               <a:rPr sz="2400" b="0" i="1">
                 <a:solidFill>
-                  <a:srgbClr val="B4B4B4"/>
+                  <a:srgbClr val="AAAAAA"/>
                 </a:solidFill>
                 <a:latin typeface="Arial"/>
               </a:rPr>
@@ -5293,8 +4733,8 @@
         </p:nvSpPr>
         <p:spPr>
           <a:xfrm>
-            <a:off x="594360" y="2980944"/>
-            <a:ext cx="11002975" cy="347472"/>
+            <a:off x="640080" y="2985516"/>
+            <a:ext cx="10911535" cy="731520"/>
           </a:xfrm>
           <a:prstGeom prst="rect">
             <a:avLst/>
@@ -5309,13 +4749,13 @@
           <a:p>
             <a:pPr algn="ctr"/>
             <a:r>
-              <a:rPr sz="2000" b="0" i="1">
-                <a:solidFill>
-                  <a:srgbClr val="8C8C8C"/>
+              <a:rPr sz="4800" b="1" i="0">
+                <a:solidFill>
+                  <a:srgbClr val="FFFFFF"/>
                 </a:solidFill>
                 <a:latin typeface="Arial"/>
               </a:rPr>
-              <a:t/>
+              <a:t>罪砕き  救った</a:t>
             </a:r>
           </a:p>
         </p:txBody>
@@ -5328,8 +4768,8 @@
         </p:nvSpPr>
         <p:spPr>
           <a:xfrm>
-            <a:off x="594360" y="3529584"/>
-            <a:ext cx="11002975" cy="685800"/>
+            <a:off x="640080" y="3753612"/>
+            <a:ext cx="10911535" cy="365760"/>
           </a:xfrm>
           <a:prstGeom prst="rect">
             <a:avLst/>
@@ -5344,83 +4784,13 @@
           <a:p>
             <a:pPr algn="ctr"/>
             <a:r>
-              <a:rPr sz="4400" b="1" i="0">
-                <a:solidFill>
-                  <a:srgbClr val="FFFFFF"/>
-                </a:solidFill>
-                <a:latin typeface="Arial"/>
-              </a:rPr>
-              <a:t>罪砕き  救った</a:t>
-            </a:r>
-          </a:p>
-        </p:txBody>
-      </p:sp>
-      <p:sp>
-        <p:nvSpPr>
-          <p:cNvPr id="6" name="TextBox 5"/>
-          <p:cNvSpPr txBox="1"/>
-          <p:nvPr/>
-        </p:nvSpPr>
-        <p:spPr>
-          <a:xfrm>
-            <a:off x="594360" y="4251960"/>
-            <a:ext cx="11002975" cy="384048"/>
-          </a:xfrm>
-          <a:prstGeom prst="rect">
-            <a:avLst/>
-          </a:prstGeom>
-          <a:noFill/>
-        </p:spPr>
-        <p:txBody>
-          <a:bodyPr wrap="square">
-            <a:spAutoFit/>
-          </a:bodyPr>
-          <a:lstStyle/>
-          <a:p>
-            <a:pPr algn="ctr"/>
-            <a:r>
               <a:rPr sz="2400" b="0" i="1">
                 <a:solidFill>
-                  <a:srgbClr val="B4B4B4"/>
+                  <a:srgbClr val="AAAAAA"/>
                 </a:solidFill>
                 <a:latin typeface="Arial"/>
               </a:rPr>
               <a:t>tsumi kudaki sukuuta</a:t>
-            </a:r>
-          </a:p>
-        </p:txBody>
-      </p:sp>
-      <p:sp>
-        <p:nvSpPr>
-          <p:cNvPr id="7" name="TextBox 6"/>
-          <p:cNvSpPr txBox="1"/>
-          <p:nvPr/>
-        </p:nvSpPr>
-        <p:spPr>
-          <a:xfrm>
-            <a:off x="594360" y="4672584"/>
-            <a:ext cx="11002975" cy="347472"/>
-          </a:xfrm>
-          <a:prstGeom prst="rect">
-            <a:avLst/>
-          </a:prstGeom>
-          <a:noFill/>
-        </p:spPr>
-        <p:txBody>
-          <a:bodyPr wrap="square">
-            <a:spAutoFit/>
-          </a:bodyPr>
-          <a:lstStyle/>
-          <a:p>
-            <a:pPr algn="ctr"/>
-            <a:r>
-              <a:rPr sz="2000" b="0" i="1">
-                <a:solidFill>
-                  <a:srgbClr val="8C8C8C"/>
-                </a:solidFill>
-                <a:latin typeface="Arial"/>
-              </a:rPr>
-              <a:t/>
             </a:r>
           </a:p>
         </p:txBody>
@@ -5459,8 +4829,8 @@
         </p:nvSpPr>
         <p:spPr>
           <a:xfrm>
-            <a:off x="594360" y="1837944"/>
-            <a:ext cx="11002975" cy="685800"/>
+            <a:off x="640080" y="1650492"/>
+            <a:ext cx="10911535" cy="731520"/>
           </a:xfrm>
           <a:prstGeom prst="rect">
             <a:avLst/>
@@ -5475,7 +4845,7 @@
           <a:p>
             <a:pPr algn="ctr"/>
             <a:r>
-              <a:rPr sz="4400" b="1" i="0">
+              <a:rPr sz="4800" b="1" i="0">
                 <a:solidFill>
                   <a:srgbClr val="FFFFFF"/>
                 </a:solidFill>
@@ -5494,8 +4864,8 @@
         </p:nvSpPr>
         <p:spPr>
           <a:xfrm>
-            <a:off x="594360" y="2560320"/>
-            <a:ext cx="11002975" cy="384048"/>
+            <a:off x="640080" y="2418588"/>
+            <a:ext cx="10911535" cy="365760"/>
           </a:xfrm>
           <a:prstGeom prst="rect">
             <a:avLst/>
@@ -5512,7 +4882,7 @@
             <a:r>
               <a:rPr sz="2400" b="0" i="1">
                 <a:solidFill>
-                  <a:srgbClr val="B4B4B4"/>
+                  <a:srgbClr val="AAAAAA"/>
                 </a:solidFill>
                 <a:latin typeface="Arial"/>
               </a:rPr>
@@ -5529,8 +4899,8 @@
         </p:nvSpPr>
         <p:spPr>
           <a:xfrm>
-            <a:off x="594360" y="2980944"/>
-            <a:ext cx="11002975" cy="347472"/>
+            <a:off x="640080" y="2985516"/>
+            <a:ext cx="10911535" cy="731520"/>
           </a:xfrm>
           <a:prstGeom prst="rect">
             <a:avLst/>
@@ -5545,13 +4915,13 @@
           <a:p>
             <a:pPr algn="ctr"/>
             <a:r>
-              <a:rPr sz="2000" b="0" i="1">
-                <a:solidFill>
-                  <a:srgbClr val="8C8C8C"/>
+              <a:rPr sz="4800" b="1" i="0">
+                <a:solidFill>
+                  <a:srgbClr val="FFFFFF"/>
                 </a:solidFill>
                 <a:latin typeface="Arial"/>
               </a:rPr>
-              <a:t/>
+              <a:t>イエス  救いの主</a:t>
             </a:r>
           </a:p>
         </p:txBody>
@@ -5564,8 +4934,8 @@
         </p:nvSpPr>
         <p:spPr>
           <a:xfrm>
-            <a:off x="594360" y="3529584"/>
-            <a:ext cx="11002975" cy="685800"/>
+            <a:off x="640080" y="3753612"/>
+            <a:ext cx="10911535" cy="365760"/>
           </a:xfrm>
           <a:prstGeom prst="rect">
             <a:avLst/>
@@ -5580,83 +4950,13 @@
           <a:p>
             <a:pPr algn="ctr"/>
             <a:r>
-              <a:rPr sz="4400" b="1" i="0">
-                <a:solidFill>
-                  <a:srgbClr val="FFFFFF"/>
-                </a:solidFill>
-                <a:latin typeface="Arial"/>
-              </a:rPr>
-              <a:t>イエス  救いの主</a:t>
-            </a:r>
-          </a:p>
-        </p:txBody>
-      </p:sp>
-      <p:sp>
-        <p:nvSpPr>
-          <p:cNvPr id="6" name="TextBox 5"/>
-          <p:cNvSpPr txBox="1"/>
-          <p:nvPr/>
-        </p:nvSpPr>
-        <p:spPr>
-          <a:xfrm>
-            <a:off x="594360" y="4251960"/>
-            <a:ext cx="11002975" cy="384048"/>
-          </a:xfrm>
-          <a:prstGeom prst="rect">
-            <a:avLst/>
-          </a:prstGeom>
-          <a:noFill/>
-        </p:spPr>
-        <p:txBody>
-          <a:bodyPr wrap="square">
-            <a:spAutoFit/>
-          </a:bodyPr>
-          <a:lstStyle/>
-          <a:p>
-            <a:pPr algn="ctr"/>
-            <a:r>
               <a:rPr sz="2400" b="0" i="1">
                 <a:solidFill>
-                  <a:srgbClr val="B4B4B4"/>
+                  <a:srgbClr val="AAAAAA"/>
                 </a:solidFill>
                 <a:latin typeface="Arial"/>
               </a:rPr>
               <a:t>iesu sukui no shu</a:t>
-            </a:r>
-          </a:p>
-        </p:txBody>
-      </p:sp>
-      <p:sp>
-        <p:nvSpPr>
-          <p:cNvPr id="7" name="TextBox 6"/>
-          <p:cNvSpPr txBox="1"/>
-          <p:nvPr/>
-        </p:nvSpPr>
-        <p:spPr>
-          <a:xfrm>
-            <a:off x="594360" y="4672584"/>
-            <a:ext cx="11002975" cy="347472"/>
-          </a:xfrm>
-          <a:prstGeom prst="rect">
-            <a:avLst/>
-          </a:prstGeom>
-          <a:noFill/>
-        </p:spPr>
-        <p:txBody>
-          <a:bodyPr wrap="square">
-            <a:spAutoFit/>
-          </a:bodyPr>
-          <a:lstStyle/>
-          <a:p>
-            <a:pPr algn="ctr"/>
-            <a:r>
-              <a:rPr sz="2000" b="0" i="1">
-                <a:solidFill>
-                  <a:srgbClr val="8C8C8C"/>
-                </a:solidFill>
-                <a:latin typeface="Arial"/>
-              </a:rPr>
-              <a:t/>
             </a:r>
           </a:p>
         </p:txBody>
@@ -5695,8 +4995,8 @@
         </p:nvSpPr>
         <p:spPr>
           <a:xfrm>
-            <a:off x="594360" y="1837944"/>
-            <a:ext cx="11002975" cy="685800"/>
+            <a:off x="640080" y="1650492"/>
+            <a:ext cx="10911535" cy="731520"/>
           </a:xfrm>
           <a:prstGeom prst="rect">
             <a:avLst/>
@@ -5711,7 +5011,7 @@
           <a:p>
             <a:pPr algn="ctr"/>
             <a:r>
-              <a:rPr sz="4400" b="1" i="0">
+              <a:rPr sz="4800" b="1" i="0">
                 <a:solidFill>
                   <a:srgbClr val="FFFFFF"/>
                 </a:solidFill>
@@ -5730,8 +5030,8 @@
         </p:nvSpPr>
         <p:spPr>
           <a:xfrm>
-            <a:off x="594360" y="2560320"/>
-            <a:ext cx="11002975" cy="384048"/>
+            <a:off x="640080" y="2418588"/>
+            <a:ext cx="10911535" cy="365760"/>
           </a:xfrm>
           <a:prstGeom prst="rect">
             <a:avLst/>
@@ -5748,7 +5048,7 @@
             <a:r>
               <a:rPr sz="2400" b="0" i="1">
                 <a:solidFill>
-                  <a:srgbClr val="B4B4B4"/>
+                  <a:srgbClr val="AAAAAA"/>
                 </a:solidFill>
                 <a:latin typeface="Arial"/>
               </a:rPr>
@@ -5765,8 +5065,8 @@
         </p:nvSpPr>
         <p:spPr>
           <a:xfrm>
-            <a:off x="594360" y="2980944"/>
-            <a:ext cx="11002975" cy="347472"/>
+            <a:off x="640080" y="2985516"/>
+            <a:ext cx="10911535" cy="731520"/>
           </a:xfrm>
           <a:prstGeom prst="rect">
             <a:avLst/>
@@ -5781,13 +5081,13 @@
           <a:p>
             <a:pPr algn="ctr"/>
             <a:r>
-              <a:rPr sz="2000" b="0" i="1">
-                <a:solidFill>
-                  <a:srgbClr val="8C8C8C"/>
+              <a:rPr sz="4800" b="1" i="0">
+                <a:solidFill>
+                  <a:srgbClr val="FFFFFF"/>
                 </a:solidFill>
                 <a:latin typeface="Arial"/>
               </a:rPr>
-              <a:t>Que veio para nós</a:t>
+              <a:t>かかげよう      より高 - く</a:t>
             </a:r>
           </a:p>
         </p:txBody>
@@ -5800,8 +5100,8 @@
         </p:nvSpPr>
         <p:spPr>
           <a:xfrm>
-            <a:off x="594360" y="3529584"/>
-            <a:ext cx="11002975" cy="685800"/>
+            <a:off x="640080" y="3753612"/>
+            <a:ext cx="10911535" cy="365760"/>
           </a:xfrm>
           <a:prstGeom prst="rect">
             <a:avLst/>
@@ -5816,13 +5116,13 @@
           <a:p>
             <a:pPr algn="ctr"/>
             <a:r>
-              <a:rPr sz="4400" b="1" i="0">
-                <a:solidFill>
-                  <a:srgbClr val="FFFFFF"/>
+              <a:rPr sz="2400" b="0" i="1">
+                <a:solidFill>
+                  <a:srgbClr val="AAAAAA"/>
                 </a:solidFill>
                 <a:latin typeface="Arial"/>
               </a:rPr>
-              <a:t>かかげよう      より高 - く</a:t>
+              <a:t>kakageyou      yori takaku</a:t>
             </a:r>
           </a:p>
         </p:txBody>
@@ -5835,8 +5135,8 @@
         </p:nvSpPr>
         <p:spPr>
           <a:xfrm>
-            <a:off x="594360" y="4251960"/>
-            <a:ext cx="11002975" cy="384048"/>
+            <a:off x="640080" y="4530852"/>
+            <a:ext cx="10911535" cy="310896"/>
           </a:xfrm>
           <a:prstGeom prst="rect">
             <a:avLst/>
@@ -5851,13 +5151,13 @@
           <a:p>
             <a:pPr algn="ctr"/>
             <a:r>
-              <a:rPr sz="2400" b="0" i="1">
-                <a:solidFill>
-                  <a:srgbClr val="B4B4B4"/>
+              <a:rPr sz="2000" b="0" i="1">
+                <a:solidFill>
+                  <a:srgbClr val="828282"/>
                 </a:solidFill>
                 <a:latin typeface="Arial"/>
               </a:rPr>
-              <a:t>kakageyou      yori takaku</a:t>
+              <a:t>Que veio para nós</a:t>
             </a:r>
           </a:p>
         </p:txBody>
@@ -5870,8 +5170,8 @@
         </p:nvSpPr>
         <p:spPr>
           <a:xfrm>
-            <a:off x="594360" y="4672584"/>
-            <a:ext cx="11002975" cy="347472"/>
+            <a:off x="640080" y="4896612"/>
+            <a:ext cx="10911535" cy="310896"/>
           </a:xfrm>
           <a:prstGeom prst="rect">
             <a:avLst/>
@@ -5888,7 +5188,7 @@
             <a:r>
               <a:rPr sz="2000" b="0" i="1">
                 <a:solidFill>
-                  <a:srgbClr val="8C8C8C"/>
+                  <a:srgbClr val="828282"/>
                 </a:solidFill>
                 <a:latin typeface="Arial"/>
               </a:rPr>

--- a/output_pptx/Stronger.pptx
+++ b/output_pptx/Stronger.pptx
@@ -3249,6 +3249,76 @@
           </a:p>
         </p:txBody>
       </p:sp>
+      <p:sp>
+        <p:nvSpPr>
+          <p:cNvPr id="6" name="TextBox 5"/>
+          <p:cNvSpPr txBox="1"/>
+          <p:nvPr/>
+        </p:nvSpPr>
+        <p:spPr>
+          <a:xfrm>
+            <a:off x="640080" y="4530852"/>
+            <a:ext cx="10911535" cy="310896"/>
+          </a:xfrm>
+          <a:prstGeom prst="rect">
+            <a:avLst/>
+          </a:prstGeom>
+          <a:noFill/>
+        </p:spPr>
+        <p:txBody>
+          <a:bodyPr wrap="square">
+            <a:spAutoFit/>
+          </a:bodyPr>
+          <a:lstStyle/>
+          <a:p>
+            <a:pPr algn="ctr"/>
+            <a:r>
+              <a:rPr sz="2000" b="0" i="1">
+                <a:solidFill>
+                  <a:srgbClr val="828282"/>
+                </a:solidFill>
+                <a:latin typeface="Arial"/>
+              </a:rPr>
+              <a:t>O amor está aqui, a cruz que carrega nossos pecados</a:t>
+            </a:r>
+          </a:p>
+        </p:txBody>
+      </p:sp>
+      <p:sp>
+        <p:nvSpPr>
+          <p:cNvPr id="7" name="TextBox 6"/>
+          <p:cNvSpPr txBox="1"/>
+          <p:nvPr/>
+        </p:nvSpPr>
+        <p:spPr>
+          <a:xfrm>
+            <a:off x="640080" y="4896612"/>
+            <a:ext cx="10911535" cy="310896"/>
+          </a:xfrm>
+          <a:prstGeom prst="rect">
+            <a:avLst/>
+          </a:prstGeom>
+          <a:noFill/>
+        </p:spPr>
+        <p:txBody>
+          <a:bodyPr wrap="square">
+            <a:spAutoFit/>
+          </a:bodyPr>
+          <a:lstStyle/>
+          <a:p>
+            <a:pPr algn="ctr"/>
+            <a:r>
+              <a:rPr sz="2000" b="0" i="1">
+                <a:solidFill>
+                  <a:srgbClr val="828282"/>
+                </a:solidFill>
+                <a:latin typeface="Arial"/>
+              </a:rPr>
+              <a:t>Você venceu</a:t>
+            </a:r>
+          </a:p>
+        </p:txBody>
+      </p:sp>
     </p:spTree>
   </p:cSld>
   <p:clrMapOvr>
@@ -3677,6 +3747,41 @@
           </a:p>
         </p:txBody>
       </p:sp>
+      <p:sp>
+        <p:nvSpPr>
+          <p:cNvPr id="5" name="TextBox 4"/>
+          <p:cNvSpPr txBox="1"/>
+          <p:nvPr/>
+        </p:nvSpPr>
+        <p:spPr>
+          <a:xfrm>
+            <a:off x="640080" y="4494276"/>
+            <a:ext cx="10911535" cy="310896"/>
+          </a:xfrm>
+          <a:prstGeom prst="rect">
+            <a:avLst/>
+          </a:prstGeom>
+          <a:noFill/>
+        </p:spPr>
+        <p:txBody>
+          <a:bodyPr wrap="square">
+            <a:spAutoFit/>
+          </a:bodyPr>
+          <a:lstStyle/>
+          <a:p>
+            <a:pPr algn="ctr"/>
+            <a:r>
+              <a:rPr sz="2000" b="0" i="0">
+                <a:solidFill>
+                  <a:srgbClr val="828282"/>
+                </a:solidFill>
+                <a:latin typeface="Arial"/>
+              </a:rPr>
+              <a:t>嵐を通して</a:t>
+            </a:r>
+          </a:p>
+        </p:txBody>
+      </p:sp>
     </p:spTree>
   </p:cSld>
   <p:clrMapOvr>
@@ -3773,6 +3878,76 @@
           </a:p>
         </p:txBody>
       </p:sp>
+      <p:sp>
+        <p:nvSpPr>
+          <p:cNvPr id="4" name="TextBox 3"/>
+          <p:cNvSpPr txBox="1"/>
+          <p:nvPr/>
+        </p:nvSpPr>
+        <p:spPr>
+          <a:xfrm>
+            <a:off x="640080" y="4128516"/>
+            <a:ext cx="10911535" cy="310896"/>
+          </a:xfrm>
+          <a:prstGeom prst="rect">
+            <a:avLst/>
+          </a:prstGeom>
+          <a:noFill/>
+        </p:spPr>
+        <p:txBody>
+          <a:bodyPr wrap="square">
+            <a:spAutoFit/>
+          </a:bodyPr>
+          <a:lstStyle/>
+          <a:p>
+            <a:pPr algn="ctr"/>
+            <a:r>
+              <a:rPr sz="2000" b="0" i="0">
+                <a:solidFill>
+                  <a:srgbClr val="828282"/>
+                </a:solidFill>
+                <a:latin typeface="Arial"/>
+              </a:rPr>
+              <a:t>火を通して</a:t>
+            </a:r>
+          </a:p>
+        </p:txBody>
+      </p:sp>
+      <p:sp>
+        <p:nvSpPr>
+          <p:cNvPr id="5" name="TextBox 4"/>
+          <p:cNvSpPr txBox="1"/>
+          <p:nvPr/>
+        </p:nvSpPr>
+        <p:spPr>
+          <a:xfrm>
+            <a:off x="640080" y="4494276"/>
+            <a:ext cx="10911535" cy="310896"/>
+          </a:xfrm>
+          <a:prstGeom prst="rect">
+            <a:avLst/>
+          </a:prstGeom>
+          <a:noFill/>
+        </p:spPr>
+        <p:txBody>
+          <a:bodyPr wrap="square">
+            <a:spAutoFit/>
+          </a:bodyPr>
+          <a:lstStyle/>
+          <a:p>
+            <a:pPr algn="ctr"/>
+            <a:r>
+              <a:rPr sz="2000" b="0" i="0">
+                <a:solidFill>
+                  <a:srgbClr val="828282"/>
+                </a:solidFill>
+                <a:latin typeface="Arial"/>
+              </a:rPr>
+              <a:t>私を自由にする真理がある</a:t>
+            </a:r>
+          </a:p>
+        </p:txBody>
+      </p:sp>
     </p:spTree>
   </p:cSld>
   <p:clrMapOvr>
@@ -3869,6 +4044,76 @@
           </a:p>
         </p:txBody>
       </p:sp>
+      <p:sp>
+        <p:nvSpPr>
+          <p:cNvPr id="4" name="TextBox 3"/>
+          <p:cNvSpPr txBox="1"/>
+          <p:nvPr/>
+        </p:nvSpPr>
+        <p:spPr>
+          <a:xfrm>
+            <a:off x="640080" y="4128516"/>
+            <a:ext cx="10911535" cy="310896"/>
+          </a:xfrm>
+          <a:prstGeom prst="rect">
+            <a:avLst/>
+          </a:prstGeom>
+          <a:noFill/>
+        </p:spPr>
+        <p:txBody>
+          <a:bodyPr wrap="square">
+            <a:spAutoFit/>
+          </a:bodyPr>
+          <a:lstStyle/>
+          <a:p>
+            <a:pPr algn="ctr"/>
+            <a:r>
+              <a:rPr sz="2000" b="0" i="0">
+                <a:solidFill>
+                  <a:srgbClr val="828282"/>
+                </a:solidFill>
+                <a:latin typeface="Arial"/>
+              </a:rPr>
+              <a:t>私の中に生きるイエス・キリスト</a:t>
+            </a:r>
+          </a:p>
+        </p:txBody>
+      </p:sp>
+      <p:sp>
+        <p:nvSpPr>
+          <p:cNvPr id="5" name="TextBox 4"/>
+          <p:cNvSpPr txBox="1"/>
+          <p:nvPr/>
+        </p:nvSpPr>
+        <p:spPr>
+          <a:xfrm>
+            <a:off x="640080" y="4494276"/>
+            <a:ext cx="10911535" cy="310896"/>
+          </a:xfrm>
+          <a:prstGeom prst="rect">
+            <a:avLst/>
+          </a:prstGeom>
+          <a:noFill/>
+        </p:spPr>
+        <p:txBody>
+          <a:bodyPr wrap="square">
+            <a:spAutoFit/>
+          </a:bodyPr>
+          <a:lstStyle/>
+          <a:p>
+            <a:pPr algn="ctr"/>
+            <a:r>
+              <a:rPr sz="2000" b="0" i="0">
+                <a:solidFill>
+                  <a:srgbClr val="828282"/>
+                </a:solidFill>
+                <a:latin typeface="Arial"/>
+              </a:rPr>
+              <a:t>あなたはより強い</a:t>
+            </a:r>
+          </a:p>
+        </p:txBody>
+      </p:sp>
     </p:spTree>
   </p:cSld>
   <p:clrMapOvr>
@@ -3965,6 +4210,41 @@
           </a:p>
         </p:txBody>
       </p:sp>
+      <p:sp>
+        <p:nvSpPr>
+          <p:cNvPr id="4" name="TextBox 3"/>
+          <p:cNvSpPr txBox="1"/>
+          <p:nvPr/>
+        </p:nvSpPr>
+        <p:spPr>
+          <a:xfrm>
+            <a:off x="640080" y="4046220"/>
+            <a:ext cx="10911535" cy="310896"/>
+          </a:xfrm>
+          <a:prstGeom prst="rect">
+            <a:avLst/>
+          </a:prstGeom>
+          <a:noFill/>
+        </p:spPr>
+        <p:txBody>
+          <a:bodyPr wrap="square">
+            <a:spAutoFit/>
+          </a:bodyPr>
+          <a:lstStyle/>
+          <a:p>
+            <a:pPr algn="ctr"/>
+            <a:r>
+              <a:rPr sz="2000" b="0" i="1">
+                <a:solidFill>
+                  <a:srgbClr val="828282"/>
+                </a:solidFill>
+                <a:latin typeface="Arial"/>
+              </a:rPr>
+              <a:t>E ressuscitou novamente</a:t>
+            </a:r>
+          </a:p>
+        </p:txBody>
+      </p:sp>
     </p:spTree>
   </p:cSld>
   <p:clrMapOvr>
@@ -4131,6 +4411,76 @@
           </a:p>
         </p:txBody>
       </p:sp>
+      <p:sp>
+        <p:nvSpPr>
+          <p:cNvPr id="6" name="TextBox 5"/>
+          <p:cNvSpPr txBox="1"/>
+          <p:nvPr/>
+        </p:nvSpPr>
+        <p:spPr>
+          <a:xfrm>
+            <a:off x="640080" y="4530852"/>
+            <a:ext cx="10911535" cy="310896"/>
+          </a:xfrm>
+          <a:prstGeom prst="rect">
+            <a:avLst/>
+          </a:prstGeom>
+          <a:noFill/>
+        </p:spPr>
+        <p:txBody>
+          <a:bodyPr wrap="square">
+            <a:spAutoFit/>
+          </a:bodyPr>
+          <a:lstStyle/>
+          <a:p>
+            <a:pPr algn="ctr"/>
+            <a:r>
+              <a:rPr sz="2000" b="0" i="1">
+                <a:solidFill>
+                  <a:srgbClr val="828282"/>
+                </a:solidFill>
+                <a:latin typeface="Arial"/>
+              </a:rPr>
+              <a:t>A verdade sempre supera a tempestade e o fogo</a:t>
+            </a:r>
+          </a:p>
+        </p:txBody>
+      </p:sp>
+      <p:sp>
+        <p:nvSpPr>
+          <p:cNvPr id="7" name="TextBox 6"/>
+          <p:cNvSpPr txBox="1"/>
+          <p:nvPr/>
+        </p:nvSpPr>
+        <p:spPr>
+          <a:xfrm>
+            <a:off x="640080" y="4896612"/>
+            <a:ext cx="10911535" cy="310896"/>
+          </a:xfrm>
+          <a:prstGeom prst="rect">
+            <a:avLst/>
+          </a:prstGeom>
+          <a:noFill/>
+        </p:spPr>
+        <p:txBody>
+          <a:bodyPr wrap="square">
+            <a:spAutoFit/>
+          </a:bodyPr>
+          <a:lstStyle/>
+          <a:p>
+            <a:pPr algn="ctr"/>
+            <a:r>
+              <a:rPr sz="2000" b="0" i="1">
+                <a:solidFill>
+                  <a:srgbClr val="828282"/>
+                </a:solidFill>
+                <a:latin typeface="Arial"/>
+              </a:rPr>
+              <a:t>Nos dá liberdade, Jesus está vivo</a:t>
+            </a:r>
+          </a:p>
+        </p:txBody>
+      </p:sp>
     </p:spTree>
   </p:cSld>
   <p:clrMapOvr>
@@ -4297,6 +4647,76 @@
           </a:p>
         </p:txBody>
       </p:sp>
+      <p:sp>
+        <p:nvSpPr>
+          <p:cNvPr id="6" name="TextBox 5"/>
+          <p:cNvSpPr txBox="1"/>
+          <p:nvPr/>
+        </p:nvSpPr>
+        <p:spPr>
+          <a:xfrm>
+            <a:off x="640080" y="4530852"/>
+            <a:ext cx="10911535" cy="310896"/>
+          </a:xfrm>
+          <a:prstGeom prst="rect">
+            <a:avLst/>
+          </a:prstGeom>
+          <a:noFill/>
+        </p:spPr>
+        <p:txBody>
+          <a:bodyPr wrap="square">
+            <a:spAutoFit/>
+          </a:bodyPr>
+          <a:lstStyle/>
+          <a:p>
+            <a:pPr algn="ctr"/>
+            <a:r>
+              <a:rPr sz="2000" b="0" i="1">
+                <a:solidFill>
+                  <a:srgbClr val="828282"/>
+                </a:solidFill>
+                <a:latin typeface="Arial"/>
+              </a:rPr>
+              <a:t>Sua força</a:t>
+            </a:r>
+          </a:p>
+        </p:txBody>
+      </p:sp>
+      <p:sp>
+        <p:nvSpPr>
+          <p:cNvPr id="7" name="TextBox 6"/>
+          <p:cNvSpPr txBox="1"/>
+          <p:nvPr/>
+        </p:nvSpPr>
+        <p:spPr>
+          <a:xfrm>
+            <a:off x="640080" y="4896612"/>
+            <a:ext cx="10911535" cy="310896"/>
+          </a:xfrm>
+          <a:prstGeom prst="rect">
+            <a:avLst/>
+          </a:prstGeom>
+          <a:noFill/>
+        </p:spPr>
+        <p:txBody>
+          <a:bodyPr wrap="square">
+            <a:spAutoFit/>
+          </a:bodyPr>
+          <a:lstStyle/>
+          <a:p>
+            <a:pPr algn="ctr"/>
+            <a:r>
+              <a:rPr sz="2000" b="0" i="1">
+                <a:solidFill>
+                  <a:srgbClr val="828282"/>
+                </a:solidFill>
+                <a:latin typeface="Arial"/>
+              </a:rPr>
+              <a:t>Quebrou o pecado e nos salvou</a:t>
+            </a:r>
+          </a:p>
+        </p:txBody>
+      </p:sp>
     </p:spTree>
   </p:cSld>
   <p:clrMapOvr>
@@ -4463,6 +4883,76 @@
           </a:p>
         </p:txBody>
       </p:sp>
+      <p:sp>
+        <p:nvSpPr>
+          <p:cNvPr id="6" name="TextBox 5"/>
+          <p:cNvSpPr txBox="1"/>
+          <p:nvPr/>
+        </p:nvSpPr>
+        <p:spPr>
+          <a:xfrm>
+            <a:off x="640080" y="4530852"/>
+            <a:ext cx="10911535" cy="310896"/>
+          </a:xfrm>
+          <a:prstGeom prst="rect">
+            <a:avLst/>
+          </a:prstGeom>
+          <a:noFill/>
+        </p:spPr>
+        <p:txBody>
+          <a:bodyPr wrap="square">
+            <a:spAutoFit/>
+          </a:bodyPr>
+          <a:lstStyle/>
+          <a:p>
+            <a:pPr algn="ctr"/>
+            <a:r>
+              <a:rPr sz="2000" b="0" i="1">
+                <a:solidFill>
+                  <a:srgbClr val="828282"/>
+                </a:solidFill>
+                <a:latin typeface="Arial"/>
+              </a:rPr>
+              <a:t>O poder da ressurreição</a:t>
+            </a:r>
+          </a:p>
+        </p:txBody>
+      </p:sp>
+      <p:sp>
+        <p:nvSpPr>
+          <p:cNvPr id="7" name="TextBox 6"/>
+          <p:cNvSpPr txBox="1"/>
+          <p:nvPr/>
+        </p:nvSpPr>
+        <p:spPr>
+          <a:xfrm>
+            <a:off x="640080" y="4896612"/>
+            <a:ext cx="10911535" cy="310896"/>
+          </a:xfrm>
+          <a:prstGeom prst="rect">
+            <a:avLst/>
+          </a:prstGeom>
+          <a:noFill/>
+        </p:spPr>
+        <p:txBody>
+          <a:bodyPr wrap="square">
+            <a:spAutoFit/>
+          </a:bodyPr>
+          <a:lstStyle/>
+          <a:p>
+            <a:pPr algn="ctr"/>
+            <a:r>
+              <a:rPr sz="2000" b="0" i="1">
+                <a:solidFill>
+                  <a:srgbClr val="828282"/>
+                </a:solidFill>
+                <a:latin typeface="Arial"/>
+              </a:rPr>
+              <a:t>Jesus, Senhor da salvação</a:t>
+            </a:r>
+          </a:p>
+        </p:txBody>
+      </p:sp>
     </p:spTree>
   </p:cSld>
   <p:clrMapOvr>
@@ -4629,6 +5119,76 @@
           </a:p>
         </p:txBody>
       </p:sp>
+      <p:sp>
+        <p:nvSpPr>
+          <p:cNvPr id="6" name="TextBox 5"/>
+          <p:cNvSpPr txBox="1"/>
+          <p:nvPr/>
+        </p:nvSpPr>
+        <p:spPr>
+          <a:xfrm>
+            <a:off x="640080" y="4530852"/>
+            <a:ext cx="10911535" cy="310896"/>
+          </a:xfrm>
+          <a:prstGeom prst="rect">
+            <a:avLst/>
+          </a:prstGeom>
+          <a:noFill/>
+        </p:spPr>
+        <p:txBody>
+          <a:bodyPr wrap="square">
+            <a:spAutoFit/>
+          </a:bodyPr>
+          <a:lstStyle/>
+          <a:p>
+            <a:pPr algn="ctr"/>
+            <a:r>
+              <a:rPr sz="2000" b="0" i="1">
+                <a:solidFill>
+                  <a:srgbClr val="828282"/>
+                </a:solidFill>
+                <a:latin typeface="Arial"/>
+              </a:rPr>
+              <a:t>Você eterno, esperança e proteção</a:t>
+            </a:r>
+          </a:p>
+        </p:txBody>
+      </p:sp>
+      <p:sp>
+        <p:nvSpPr>
+          <p:cNvPr id="7" name="TextBox 6"/>
+          <p:cNvSpPr txBox="1"/>
+          <p:nvPr/>
+        </p:nvSpPr>
+        <p:spPr>
+          <a:xfrm>
+            <a:off x="640080" y="4896612"/>
+            <a:ext cx="10911535" cy="310896"/>
+          </a:xfrm>
+          <a:prstGeom prst="rect">
+            <a:avLst/>
+          </a:prstGeom>
+          <a:noFill/>
+        </p:spPr>
+        <p:txBody>
+          <a:bodyPr wrap="square">
+            <a:spAutoFit/>
+          </a:bodyPr>
+          <a:lstStyle/>
+          <a:p>
+            <a:pPr algn="ctr"/>
+            <a:r>
+              <a:rPr sz="2000" b="0" i="1">
+                <a:solidFill>
+                  <a:srgbClr val="828282"/>
+                </a:solidFill>
+                <a:latin typeface="Arial"/>
+              </a:rPr>
+              <a:t>Para salvar nossas almas, carregou a cruz</a:t>
+            </a:r>
+          </a:p>
+        </p:txBody>
+      </p:sp>
     </p:spTree>
   </p:cSld>
   <p:clrMapOvr>
@@ -4795,6 +5355,76 @@
           </a:p>
         </p:txBody>
       </p:sp>
+      <p:sp>
+        <p:nvSpPr>
+          <p:cNvPr id="6" name="TextBox 5"/>
+          <p:cNvSpPr txBox="1"/>
+          <p:nvPr/>
+        </p:nvSpPr>
+        <p:spPr>
+          <a:xfrm>
+            <a:off x="640080" y="4530852"/>
+            <a:ext cx="10911535" cy="310896"/>
+          </a:xfrm>
+          <a:prstGeom prst="rect">
+            <a:avLst/>
+          </a:prstGeom>
+          <a:noFill/>
+        </p:spPr>
+        <p:txBody>
+          <a:bodyPr wrap="square">
+            <a:spAutoFit/>
+          </a:bodyPr>
+          <a:lstStyle/>
+          <a:p>
+            <a:pPr algn="ctr"/>
+            <a:r>
+              <a:rPr sz="2000" b="0" i="1">
+                <a:solidFill>
+                  <a:srgbClr val="828282"/>
+                </a:solidFill>
+                <a:latin typeface="Arial"/>
+              </a:rPr>
+              <a:t>Sua força</a:t>
+            </a:r>
+          </a:p>
+        </p:txBody>
+      </p:sp>
+      <p:sp>
+        <p:nvSpPr>
+          <p:cNvPr id="7" name="TextBox 6"/>
+          <p:cNvSpPr txBox="1"/>
+          <p:nvPr/>
+        </p:nvSpPr>
+        <p:spPr>
+          <a:xfrm>
+            <a:off x="640080" y="4896612"/>
+            <a:ext cx="10911535" cy="310896"/>
+          </a:xfrm>
+          <a:prstGeom prst="rect">
+            <a:avLst/>
+          </a:prstGeom>
+          <a:noFill/>
+        </p:spPr>
+        <p:txBody>
+          <a:bodyPr wrap="square">
+            <a:spAutoFit/>
+          </a:bodyPr>
+          <a:lstStyle/>
+          <a:p>
+            <a:pPr algn="ctr"/>
+            <a:r>
+              <a:rPr sz="2000" b="0" i="1">
+                <a:solidFill>
+                  <a:srgbClr val="828282"/>
+                </a:solidFill>
+                <a:latin typeface="Arial"/>
+              </a:rPr>
+              <a:t>Quebrou o pecado e nos salvou</a:t>
+            </a:r>
+          </a:p>
+        </p:txBody>
+      </p:sp>
     </p:spTree>
   </p:cSld>
   <p:clrMapOvr>
@@ -4957,6 +5587,76 @@
                 <a:latin typeface="Arial"/>
               </a:rPr>
               <a:t>iesu sukui no shu</a:t>
+            </a:r>
+          </a:p>
+        </p:txBody>
+      </p:sp>
+      <p:sp>
+        <p:nvSpPr>
+          <p:cNvPr id="6" name="TextBox 5"/>
+          <p:cNvSpPr txBox="1"/>
+          <p:nvPr/>
+        </p:nvSpPr>
+        <p:spPr>
+          <a:xfrm>
+            <a:off x="640080" y="4530852"/>
+            <a:ext cx="10911535" cy="310896"/>
+          </a:xfrm>
+          <a:prstGeom prst="rect">
+            <a:avLst/>
+          </a:prstGeom>
+          <a:noFill/>
+        </p:spPr>
+        <p:txBody>
+          <a:bodyPr wrap="square">
+            <a:spAutoFit/>
+          </a:bodyPr>
+          <a:lstStyle/>
+          <a:p>
+            <a:pPr algn="ctr"/>
+            <a:r>
+              <a:rPr sz="2000" b="0" i="1">
+                <a:solidFill>
+                  <a:srgbClr val="828282"/>
+                </a:solidFill>
+                <a:latin typeface="Arial"/>
+              </a:rPr>
+              <a:t>O poder da ressurreição</a:t>
+            </a:r>
+          </a:p>
+        </p:txBody>
+      </p:sp>
+      <p:sp>
+        <p:nvSpPr>
+          <p:cNvPr id="7" name="TextBox 6"/>
+          <p:cNvSpPr txBox="1"/>
+          <p:nvPr/>
+        </p:nvSpPr>
+        <p:spPr>
+          <a:xfrm>
+            <a:off x="640080" y="4896612"/>
+            <a:ext cx="10911535" cy="310896"/>
+          </a:xfrm>
+          <a:prstGeom prst="rect">
+            <a:avLst/>
+          </a:prstGeom>
+          <a:noFill/>
+        </p:spPr>
+        <p:txBody>
+          <a:bodyPr wrap="square">
+            <a:spAutoFit/>
+          </a:bodyPr>
+          <a:lstStyle/>
+          <a:p>
+            <a:pPr algn="ctr"/>
+            <a:r>
+              <a:rPr sz="2000" b="0" i="1">
+                <a:solidFill>
+                  <a:srgbClr val="828282"/>
+                </a:solidFill>
+                <a:latin typeface="Arial"/>
+              </a:rPr>
+              <a:t>Jesus, Senhor da salvação</a:t>
             </a:r>
           </a:p>
         </p:txBody>
